--- a/presentation/ELSA_Depression_Prediction_Zannat.pptx
+++ b/presentation/ELSA_Depression_Prediction_Zannat.pptx
@@ -4851,13 +4851,12 @@
         </p:nvPicPr>
         <p:blipFill>
           <a:blip r:embed="rId2"/>
-          <a:srcRect l="13328" r="13328" t="0" b="0"/>
           <a:stretch/>
         </p:blipFill>
         <p:spPr>
           <a:xfrm>
-            <a:off x="8026400" y="2057400"/>
-            <a:ext cx="3683000" cy="3556000"/>
+            <a:off x="8026400" y="2531328"/>
+            <a:ext cx="3683000" cy="2608143"/>
           </a:xfrm>
           <a:prstGeom prst="roundRect">
             <a:avLst>
@@ -4876,13 +4875,12 @@
         </p:nvPicPr>
         <p:blipFill>
           <a:blip r:embed="rId3"/>
-          <a:srcRect l="13482" r="13482" t="0" b="0"/>
           <a:stretch/>
         </p:blipFill>
         <p:spPr>
           <a:xfrm>
-            <a:off x="11963400" y="2057400"/>
-            <a:ext cx="3683000" cy="3556000"/>
+            <a:off x="11963400" y="2536821"/>
+            <a:ext cx="3683000" cy="2597158"/>
           </a:xfrm>
           <a:prstGeom prst="roundRect">
             <a:avLst>
@@ -5353,13 +5351,12 @@
         </p:nvPicPr>
         <p:blipFill>
           <a:blip r:embed="rId2"/>
-          <a:srcRect l="0" r="0" t="24265" b="24265"/>
           <a:stretch/>
         </p:blipFill>
         <p:spPr>
           <a:xfrm>
-            <a:off x="609600" y="4381500"/>
-            <a:ext cx="7112000" cy="2540000"/>
+            <a:off x="2335306" y="4381500"/>
+            <a:ext cx="3660588" cy="2540000"/>
           </a:xfrm>
           <a:prstGeom prst="roundRect">
             <a:avLst>
@@ -7250,13 +7247,12 @@
         </p:nvPicPr>
         <p:blipFill>
           <a:blip r:embed="rId3"/>
-          <a:srcRect l="0" r="0" t="24779" b="24779"/>
           <a:stretch/>
         </p:blipFill>
         <p:spPr>
           <a:xfrm>
-            <a:off x="8026400" y="5996940"/>
-            <a:ext cx="7620000" cy="2667000"/>
+            <a:off x="9914591" y="5996940"/>
+            <a:ext cx="3843618" cy="2667000"/>
           </a:xfrm>
           <a:prstGeom prst="roundRect">
             <a:avLst>
@@ -10949,13 +10945,12 @@
         </p:nvPicPr>
         <p:blipFill>
           <a:blip r:embed="rId1"/>
-          <a:srcRect l="6992" r="6992" t="0" b="0"/>
           <a:stretch/>
         </p:blipFill>
         <p:spPr>
           <a:xfrm>
-            <a:off x="8280400" y="1333500"/>
-            <a:ext cx="7366000" cy="3556000"/>
+            <a:off x="8280400" y="1582118"/>
+            <a:ext cx="7366000" cy="3058763"/>
           </a:xfrm>
           <a:prstGeom prst="roundRect">
             <a:avLst>
@@ -15980,13 +15975,12 @@
         </p:nvPicPr>
         <p:blipFill>
           <a:blip r:embed="rId1"/>
-          <a:srcRect l="18787" r="18787" t="0" b="0"/>
           <a:stretch/>
         </p:blipFill>
         <p:spPr>
           <a:xfrm>
-            <a:off x="609600" y="4762500"/>
-            <a:ext cx="6985000" cy="3937000"/>
+            <a:off x="609600" y="5502157"/>
+            <a:ext cx="6985000" cy="2457685"/>
           </a:xfrm>
           <a:prstGeom prst="roundRect">
             <a:avLst>
@@ -27666,13 +27660,12 @@
         </p:nvPicPr>
         <p:blipFill>
           <a:blip r:embed="rId2"/>
-          <a:srcRect l="0" r="0" t="14792" b="14792"/>
           <a:stretch/>
         </p:blipFill>
         <p:spPr>
           <a:xfrm>
-            <a:off x="8026400" y="4953000"/>
-            <a:ext cx="7620000" cy="3302000"/>
+            <a:off x="9153525" y="4953000"/>
+            <a:ext cx="5365750" cy="3302000"/>
           </a:xfrm>
           <a:prstGeom prst="roundRect">
             <a:avLst>
@@ -29811,13 +29804,12 @@
         </p:nvPicPr>
         <p:blipFill>
           <a:blip r:embed="rId1"/>
-          <a:srcRect l="0" r="0" t="22711" b="22711"/>
           <a:stretch/>
         </p:blipFill>
         <p:spPr>
           <a:xfrm>
-            <a:off x="8280400" y="1333500"/>
-            <a:ext cx="7366000" cy="3429000"/>
+            <a:off x="9953296" y="1333500"/>
+            <a:ext cx="4020207" cy="3429000"/>
           </a:xfrm>
           <a:prstGeom prst="roundRect">
             <a:avLst>
@@ -29877,13 +29869,12 @@
         </p:nvPicPr>
         <p:blipFill>
           <a:blip r:embed="rId2"/>
-          <a:srcRect l="0" r="0" t="22711" b="22711"/>
           <a:stretch/>
         </p:blipFill>
         <p:spPr>
           <a:xfrm>
-            <a:off x="8280400" y="5143500"/>
-            <a:ext cx="7366000" cy="3429000"/>
+            <a:off x="9953296" y="5143500"/>
+            <a:ext cx="4020207" cy="3429000"/>
           </a:xfrm>
           <a:prstGeom prst="roundRect">
             <a:avLst>
@@ -30368,13 +30359,12 @@
         </p:nvPicPr>
         <p:blipFill>
           <a:blip r:embed="rId2"/>
-          <a:srcRect l="0" r="0" t="22479" b="22479"/>
           <a:stretch/>
         </p:blipFill>
         <p:spPr>
           <a:xfrm>
-            <a:off x="8026400" y="1333500"/>
-            <a:ext cx="7620000" cy="3556000"/>
+            <a:off x="9739272" y="1333500"/>
+            <a:ext cx="4194256" cy="3556000"/>
           </a:xfrm>
           <a:prstGeom prst="roundRect">
             <a:avLst>
